--- a/reports/AML Alert System Final Presentation.pptx
+++ b/reports/AML Alert System Final Presentation.pptx
@@ -1394,7 +1394,7 @@
           <a:p>
             <a:r>
               <a:rPr lang="en-US" dirty="0"/>
-              <a:t>All models live in one MLflow registered model. Nothing in the code points to a file; it points to an alias. The champion feeds the alert list and the API. The challenger is scored every day but never shown: that is our shadow deployment. The baseline, logistic regression, is not scored every day; each training run draws the champion and the challenger against it, so we can see they are clearly better. Retraining is never automatic: when the monitor raises a drift alert, a person decides whether to run the training DAG. Its two new models only run in shadow, next to the champion, and the old challenger stops. When the shadow results look better, a person gives one new model the champion alias and the other the challenger alias in MLflow, and calls reload on the API. Then it is one champion and one challenger again. It works like a blue-green switch, and rollback is just moving the alias back. We tested the switch while the API was running.</a:t>
+              <a:t>All models live in one MLflow registered model. Nothing in the code points to a file; it points to an alias. The champion feeds the alert list and the API. The challenger is scored every day but never shown: that is our shadow deployment. The baseline, logistic regression, is not scored every day; each training run draws the champion and the challenger against it, so we can see they are clearly better. Retraining is never automatic: when the monitor raises a drift alert, a person decides whether to run the training DAG. Its two new models only run in shadow, next to the champion, and the old challenger stops. The rule for better is written down: at least three labelled days with higher precision at 500, and no other metric worse. When a shadow model meets it, a person runs one command, model promote. It gives one new model the champion alias and the other the challenger alias, records who did it and why, and tells the API to reload. The API also checks the alias every minute, so every API container follows. Then it is one champion and one challenger again. It works like a blue-green switch, and rollback is the same command with the old version. We tested promotion and rollback while the API was running.</a:t>
             </a:r>
             <a:endParaRPr lang="en-US" dirty="0"/>
           </a:p>
@@ -11778,7 +11778,7 @@
                 <a:ea typeface="IBM Plex Sans" pitchFamily="34" charset="-122"/>
                 <a:cs typeface="IBM Plex Sans" pitchFamily="34" charset="-120"/>
               </a:rPr>
-              <a:t>A person sets champion and challenger</a:t>
+              <a:t>One command promotes, logs who and why</a:t>
             </a:r>
             <a:endParaRPr lang="en-US" sz="1200" dirty="0"/>
           </a:p>
@@ -11854,7 +11854,7 @@
                 <a:ea typeface="IBM Plex Sans" pitchFamily="34" charset="-122"/>
                 <a:cs typeface="IBM Plex Sans" pitchFamily="34" charset="-120"/>
               </a:rPr>
-              <a:t>POST /reload, no restart</a:t>
+              <a:t>API reloads, no restart</a:t>
             </a:r>
             <a:endParaRPr lang="en-US" sz="1200" dirty="0"/>
           </a:p>
@@ -11898,7 +11898,7 @@
                 <a:ea typeface="IBM Plex Sans" pitchFamily="34" charset="-122"/>
                 <a:cs typeface="IBM Plex Sans" pitchFamily="34" charset="-120"/>
               </a:rPr>
-              <a:t>Rollback is moving the alias back. We tested v2 to v3 and back while the API kept serving.</a:t>
+              <a:t>Rollback is the same command with the old version. Tested while the API kept serving.</a:t>
             </a:r>
             <a:endParaRPr lang="en-US" sz="1400" dirty="0"/>
           </a:p>

--- a/reports/AML Alert System Final Presentation.pptx
+++ b/reports/AML Alert System Final Presentation.pptx
@@ -6871,7 +6871,7 @@
       </p:sp>
       <p:pic>
         <p:nvPicPr>
-          <p:cNvPr id="5" name="Image 0" descr="Architecture: three Airflow DAGs. The daily data DAG turns the transaction file into bronze and silver tables, then a feature store, graph features and a label store; the manual training DAG registers models in MLflow; the daily inference DAG writes the alert list and the scores, then the monitor checks quality and drift and raises alerts; a FastAPI service reads the same feature store and champion alias">    </p:cNvPr>
+          <p:cNvPr id="5" name="Image 0" descr="Architecture: three Airflow DAGs. The daily data DAG turns the transaction file into bronze and silver tables, then a feature store, graph features and a label store; the manual training DAG registers models in MLflow; the daily inference DAG writes the alert list and the scores, then the monitor checks quality and drift and raises alerts; a person promotes a shadow model with model_promote.py; a FastAPI service reads the same feature store and champion alias">    </p:cNvPr>
           <p:cNvPicPr>
             <a:picLocks noChangeAspect="1"/>
           </p:cNvPicPr>
@@ -6879,18 +6879,17 @@
         </p:nvPicPr>
         <p:blipFill>
           <a:blip r:embed="rId1"/>
-          <a:srcRect l="-113" r="-113" t="0" b="0"/>
-          <a:stretch/>
+          <a:stretch>
+            <a:fillRect/>
+          </a:stretch>
         </p:blipFill>
         <p:spPr>
           <a:xfrm>
-            <a:off x="819150" y="1835100"/>
-            <a:ext cx="8178800" cy="3860800"/>
-          </a:xfrm>
-          <a:prstGeom prst="roundRect">
-            <a:avLst>
-              <a:gd name="adj" fmla="val 1809"/>
-            </a:avLst>
+            <a:off x="1229714" y="1835100"/>
+            <a:ext cx="7357672" cy="3860800"/>
+          </a:xfrm>
+          <a:prstGeom prst="rect">
+            <a:avLst/>
           </a:prstGeom>
         </p:spPr>
       </p:pic>
